--- a/120信徒生活.pptx
+++ b/120信徒生活.pptx
@@ -175,7 +175,7 @@
           <a:lstStyle/>
           <a:p>
             <a:r>
-              <a:rPr lang="en-US" altLang="zh-TW" smtClean="0"/>
+              <a:rPr lang="en-US" altLang="zh-TW"/>
               <a:t>Click to edit Master title style</a:t>
             </a:r>
             <a:endParaRPr lang="zh-TW" altLang="en-US"/>
@@ -294,7 +294,7 @@
           </a:lstStyle>
           <a:p>
             <a:r>
-              <a:rPr lang="en-US" altLang="zh-TW" smtClean="0"/>
+              <a:rPr lang="en-US" altLang="zh-TW"/>
               <a:t>Click to edit Master subtitle style</a:t>
             </a:r>
             <a:endParaRPr lang="zh-TW" altLang="en-US"/>
@@ -319,7 +319,7 @@
             <a:fld id="{86B5546F-C09B-4E63-ABC5-F7C86A7E8D66}" type="datetimeFigureOut">
               <a:rPr lang="en-US" smtClean="0"/>
               <a:pPr/>
-              <a:t>7/15/2020</a:t>
+              <a:t>8/1/2025</a:t>
             </a:fld>
             <a:endParaRPr lang="en-US"/>
           </a:p>
@@ -414,7 +414,7 @@
           <a:lstStyle/>
           <a:p>
             <a:r>
-              <a:rPr lang="en-US" altLang="zh-TW" smtClean="0"/>
+              <a:rPr lang="en-US" altLang="zh-TW"/>
               <a:t>Click to edit Master title style</a:t>
             </a:r>
             <a:endParaRPr lang="zh-TW" altLang="en-US"/>
@@ -438,35 +438,35 @@
           <a:p>
             <a:pPr lvl="0"/>
             <a:r>
-              <a:rPr lang="en-US" altLang="zh-TW" smtClean="0"/>
+              <a:rPr lang="en-US" altLang="zh-TW"/>
               <a:t>Edit Master text styles</a:t>
             </a:r>
           </a:p>
           <a:p>
             <a:pPr lvl="1"/>
             <a:r>
-              <a:rPr lang="en-US" altLang="zh-TW" smtClean="0"/>
+              <a:rPr lang="en-US" altLang="zh-TW"/>
               <a:t>Second level</a:t>
             </a:r>
           </a:p>
           <a:p>
             <a:pPr lvl="2"/>
             <a:r>
-              <a:rPr lang="en-US" altLang="zh-TW" smtClean="0"/>
+              <a:rPr lang="en-US" altLang="zh-TW"/>
               <a:t>Third level</a:t>
             </a:r>
           </a:p>
           <a:p>
             <a:pPr lvl="3"/>
             <a:r>
-              <a:rPr lang="en-US" altLang="zh-TW" smtClean="0"/>
+              <a:rPr lang="en-US" altLang="zh-TW"/>
               <a:t>Fourth level</a:t>
             </a:r>
           </a:p>
           <a:p>
             <a:pPr lvl="4"/>
             <a:r>
-              <a:rPr lang="en-US" altLang="zh-TW" smtClean="0"/>
+              <a:rPr lang="en-US" altLang="zh-TW"/>
               <a:t>Fifth level</a:t>
             </a:r>
             <a:endParaRPr lang="zh-TW" altLang="en-US"/>
@@ -491,7 +491,7 @@
             <a:fld id="{86B5546F-C09B-4E63-ABC5-F7C86A7E8D66}" type="datetimeFigureOut">
               <a:rPr lang="en-US" smtClean="0"/>
               <a:pPr/>
-              <a:t>7/15/2020</a:t>
+              <a:t>8/1/2025</a:t>
             </a:fld>
             <a:endParaRPr lang="en-US"/>
           </a:p>
@@ -591,7 +591,7 @@
           <a:lstStyle/>
           <a:p>
             <a:r>
-              <a:rPr lang="en-US" altLang="zh-TW" smtClean="0"/>
+              <a:rPr lang="en-US" altLang="zh-TW"/>
               <a:t>Click to edit Master title style</a:t>
             </a:r>
             <a:endParaRPr lang="zh-TW" altLang="en-US"/>
@@ -620,35 +620,35 @@
           <a:p>
             <a:pPr lvl="0"/>
             <a:r>
-              <a:rPr lang="en-US" altLang="zh-TW" smtClean="0"/>
+              <a:rPr lang="en-US" altLang="zh-TW"/>
               <a:t>Edit Master text styles</a:t>
             </a:r>
           </a:p>
           <a:p>
             <a:pPr lvl="1"/>
             <a:r>
-              <a:rPr lang="en-US" altLang="zh-TW" smtClean="0"/>
+              <a:rPr lang="en-US" altLang="zh-TW"/>
               <a:t>Second level</a:t>
             </a:r>
           </a:p>
           <a:p>
             <a:pPr lvl="2"/>
             <a:r>
-              <a:rPr lang="en-US" altLang="zh-TW" smtClean="0"/>
+              <a:rPr lang="en-US" altLang="zh-TW"/>
               <a:t>Third level</a:t>
             </a:r>
           </a:p>
           <a:p>
             <a:pPr lvl="3"/>
             <a:r>
-              <a:rPr lang="en-US" altLang="zh-TW" smtClean="0"/>
+              <a:rPr lang="en-US" altLang="zh-TW"/>
               <a:t>Fourth level</a:t>
             </a:r>
           </a:p>
           <a:p>
             <a:pPr lvl="4"/>
             <a:r>
-              <a:rPr lang="en-US" altLang="zh-TW" smtClean="0"/>
+              <a:rPr lang="en-US" altLang="zh-TW"/>
               <a:t>Fifth level</a:t>
             </a:r>
             <a:endParaRPr lang="zh-TW" altLang="en-US"/>
@@ -673,7 +673,7 @@
             <a:fld id="{86B5546F-C09B-4E63-ABC5-F7C86A7E8D66}" type="datetimeFigureOut">
               <a:rPr lang="en-US" smtClean="0"/>
               <a:pPr/>
-              <a:t>7/15/2020</a:t>
+              <a:t>8/1/2025</a:t>
             </a:fld>
             <a:endParaRPr lang="en-US"/>
           </a:p>
@@ -768,7 +768,7 @@
           <a:lstStyle/>
           <a:p>
             <a:r>
-              <a:rPr lang="en-US" altLang="zh-TW" smtClean="0"/>
+              <a:rPr lang="en-US" altLang="zh-TW"/>
               <a:t>Click to edit Master title style</a:t>
             </a:r>
             <a:endParaRPr lang="zh-TW" altLang="en-US"/>
@@ -792,35 +792,35 @@
           <a:p>
             <a:pPr lvl="0"/>
             <a:r>
-              <a:rPr lang="en-US" altLang="zh-TW" smtClean="0"/>
+              <a:rPr lang="en-US" altLang="zh-TW"/>
               <a:t>Edit Master text styles</a:t>
             </a:r>
           </a:p>
           <a:p>
             <a:pPr lvl="1"/>
             <a:r>
-              <a:rPr lang="en-US" altLang="zh-TW" smtClean="0"/>
+              <a:rPr lang="en-US" altLang="zh-TW"/>
               <a:t>Second level</a:t>
             </a:r>
           </a:p>
           <a:p>
             <a:pPr lvl="2"/>
             <a:r>
-              <a:rPr lang="en-US" altLang="zh-TW" smtClean="0"/>
+              <a:rPr lang="en-US" altLang="zh-TW"/>
               <a:t>Third level</a:t>
             </a:r>
           </a:p>
           <a:p>
             <a:pPr lvl="3"/>
             <a:r>
-              <a:rPr lang="en-US" altLang="zh-TW" smtClean="0"/>
+              <a:rPr lang="en-US" altLang="zh-TW"/>
               <a:t>Fourth level</a:t>
             </a:r>
           </a:p>
           <a:p>
             <a:pPr lvl="4"/>
             <a:r>
-              <a:rPr lang="en-US" altLang="zh-TW" smtClean="0"/>
+              <a:rPr lang="en-US" altLang="zh-TW"/>
               <a:t>Fifth level</a:t>
             </a:r>
             <a:endParaRPr lang="zh-TW" altLang="en-US"/>
@@ -845,7 +845,7 @@
             <a:fld id="{86B5546F-C09B-4E63-ABC5-F7C86A7E8D66}" type="datetimeFigureOut">
               <a:rPr lang="en-US" smtClean="0"/>
               <a:pPr/>
-              <a:t>7/15/2020</a:t>
+              <a:t>8/1/2025</a:t>
             </a:fld>
             <a:endParaRPr lang="en-US"/>
           </a:p>
@@ -949,7 +949,7 @@
           </a:lstStyle>
           <a:p>
             <a:r>
-              <a:rPr lang="en-US" altLang="zh-TW" smtClean="0"/>
+              <a:rPr lang="en-US" altLang="zh-TW"/>
               <a:t>Click to edit Master title style</a:t>
             </a:r>
             <a:endParaRPr lang="zh-TW" altLang="en-US"/>
@@ -1069,7 +1069,7 @@
           <a:p>
             <a:pPr lvl="0"/>
             <a:r>
-              <a:rPr lang="en-US" altLang="zh-TW" smtClean="0"/>
+              <a:rPr lang="en-US" altLang="zh-TW"/>
               <a:t>Edit Master text styles</a:t>
             </a:r>
           </a:p>
@@ -1093,7 +1093,7 @@
             <a:fld id="{86B5546F-C09B-4E63-ABC5-F7C86A7E8D66}" type="datetimeFigureOut">
               <a:rPr lang="en-US" smtClean="0"/>
               <a:pPr/>
-              <a:t>7/15/2020</a:t>
+              <a:t>8/1/2025</a:t>
             </a:fld>
             <a:endParaRPr lang="en-US"/>
           </a:p>
@@ -1188,7 +1188,7 @@
           <a:lstStyle/>
           <a:p>
             <a:r>
-              <a:rPr lang="en-US" altLang="zh-TW" smtClean="0"/>
+              <a:rPr lang="en-US" altLang="zh-TW"/>
               <a:t>Click to edit Master title style</a:t>
             </a:r>
             <a:endParaRPr lang="zh-TW" altLang="en-US"/>
@@ -1245,35 +1245,35 @@
           <a:p>
             <a:pPr lvl="0"/>
             <a:r>
-              <a:rPr lang="en-US" altLang="zh-TW" smtClean="0"/>
+              <a:rPr lang="en-US" altLang="zh-TW"/>
               <a:t>Edit Master text styles</a:t>
             </a:r>
           </a:p>
           <a:p>
             <a:pPr lvl="1"/>
             <a:r>
-              <a:rPr lang="en-US" altLang="zh-TW" smtClean="0"/>
+              <a:rPr lang="en-US" altLang="zh-TW"/>
               <a:t>Second level</a:t>
             </a:r>
           </a:p>
           <a:p>
             <a:pPr lvl="2"/>
             <a:r>
-              <a:rPr lang="en-US" altLang="zh-TW" smtClean="0"/>
+              <a:rPr lang="en-US" altLang="zh-TW"/>
               <a:t>Third level</a:t>
             </a:r>
           </a:p>
           <a:p>
             <a:pPr lvl="3"/>
             <a:r>
-              <a:rPr lang="en-US" altLang="zh-TW" smtClean="0"/>
+              <a:rPr lang="en-US" altLang="zh-TW"/>
               <a:t>Fourth level</a:t>
             </a:r>
           </a:p>
           <a:p>
             <a:pPr lvl="4"/>
             <a:r>
-              <a:rPr lang="en-US" altLang="zh-TW" smtClean="0"/>
+              <a:rPr lang="en-US" altLang="zh-TW"/>
               <a:t>Fifth level</a:t>
             </a:r>
             <a:endParaRPr lang="zh-TW" altLang="en-US"/>
@@ -1330,35 +1330,35 @@
           <a:p>
             <a:pPr lvl="0"/>
             <a:r>
-              <a:rPr lang="en-US" altLang="zh-TW" smtClean="0"/>
+              <a:rPr lang="en-US" altLang="zh-TW"/>
               <a:t>Edit Master text styles</a:t>
             </a:r>
           </a:p>
           <a:p>
             <a:pPr lvl="1"/>
             <a:r>
-              <a:rPr lang="en-US" altLang="zh-TW" smtClean="0"/>
+              <a:rPr lang="en-US" altLang="zh-TW"/>
               <a:t>Second level</a:t>
             </a:r>
           </a:p>
           <a:p>
             <a:pPr lvl="2"/>
             <a:r>
-              <a:rPr lang="en-US" altLang="zh-TW" smtClean="0"/>
+              <a:rPr lang="en-US" altLang="zh-TW"/>
               <a:t>Third level</a:t>
             </a:r>
           </a:p>
           <a:p>
             <a:pPr lvl="3"/>
             <a:r>
-              <a:rPr lang="en-US" altLang="zh-TW" smtClean="0"/>
+              <a:rPr lang="en-US" altLang="zh-TW"/>
               <a:t>Fourth level</a:t>
             </a:r>
           </a:p>
           <a:p>
             <a:pPr lvl="4"/>
             <a:r>
-              <a:rPr lang="en-US" altLang="zh-TW" smtClean="0"/>
+              <a:rPr lang="en-US" altLang="zh-TW"/>
               <a:t>Fifth level</a:t>
             </a:r>
             <a:endParaRPr lang="zh-TW" altLang="en-US"/>
@@ -1383,7 +1383,7 @@
             <a:fld id="{86B5546F-C09B-4E63-ABC5-F7C86A7E8D66}" type="datetimeFigureOut">
               <a:rPr lang="en-US" smtClean="0"/>
               <a:pPr/>
-              <a:t>7/15/2020</a:t>
+              <a:t>8/1/2025</a:t>
             </a:fld>
             <a:endParaRPr lang="en-US"/>
           </a:p>
@@ -1482,7 +1482,7 @@
           </a:lstStyle>
           <a:p>
             <a:r>
-              <a:rPr lang="en-US" altLang="zh-TW" smtClean="0"/>
+              <a:rPr lang="en-US" altLang="zh-TW"/>
               <a:t>Click to edit Master title style</a:t>
             </a:r>
             <a:endParaRPr lang="zh-TW" altLang="en-US"/>
@@ -1548,7 +1548,7 @@
           <a:p>
             <a:pPr lvl="0"/>
             <a:r>
-              <a:rPr lang="en-US" altLang="zh-TW" smtClean="0"/>
+              <a:rPr lang="en-US" altLang="zh-TW"/>
               <a:t>Edit Master text styles</a:t>
             </a:r>
           </a:p>
@@ -1604,35 +1604,35 @@
           <a:p>
             <a:pPr lvl="0"/>
             <a:r>
-              <a:rPr lang="en-US" altLang="zh-TW" smtClean="0"/>
+              <a:rPr lang="en-US" altLang="zh-TW"/>
               <a:t>Edit Master text styles</a:t>
             </a:r>
           </a:p>
           <a:p>
             <a:pPr lvl="1"/>
             <a:r>
-              <a:rPr lang="en-US" altLang="zh-TW" smtClean="0"/>
+              <a:rPr lang="en-US" altLang="zh-TW"/>
               <a:t>Second level</a:t>
             </a:r>
           </a:p>
           <a:p>
             <a:pPr lvl="2"/>
             <a:r>
-              <a:rPr lang="en-US" altLang="zh-TW" smtClean="0"/>
+              <a:rPr lang="en-US" altLang="zh-TW"/>
               <a:t>Third level</a:t>
             </a:r>
           </a:p>
           <a:p>
             <a:pPr lvl="3"/>
             <a:r>
-              <a:rPr lang="en-US" altLang="zh-TW" smtClean="0"/>
+              <a:rPr lang="en-US" altLang="zh-TW"/>
               <a:t>Fourth level</a:t>
             </a:r>
           </a:p>
           <a:p>
             <a:pPr lvl="4"/>
             <a:r>
-              <a:rPr lang="en-US" altLang="zh-TW" smtClean="0"/>
+              <a:rPr lang="en-US" altLang="zh-TW"/>
               <a:t>Fifth level</a:t>
             </a:r>
             <a:endParaRPr lang="zh-TW" altLang="en-US"/>
@@ -1698,7 +1698,7 @@
           <a:p>
             <a:pPr lvl="0"/>
             <a:r>
-              <a:rPr lang="en-US" altLang="zh-TW" smtClean="0"/>
+              <a:rPr lang="en-US" altLang="zh-TW"/>
               <a:t>Edit Master text styles</a:t>
             </a:r>
           </a:p>
@@ -1754,35 +1754,35 @@
           <a:p>
             <a:pPr lvl="0"/>
             <a:r>
-              <a:rPr lang="en-US" altLang="zh-TW" smtClean="0"/>
+              <a:rPr lang="en-US" altLang="zh-TW"/>
               <a:t>Edit Master text styles</a:t>
             </a:r>
           </a:p>
           <a:p>
             <a:pPr lvl="1"/>
             <a:r>
-              <a:rPr lang="en-US" altLang="zh-TW" smtClean="0"/>
+              <a:rPr lang="en-US" altLang="zh-TW"/>
               <a:t>Second level</a:t>
             </a:r>
           </a:p>
           <a:p>
             <a:pPr lvl="2"/>
             <a:r>
-              <a:rPr lang="en-US" altLang="zh-TW" smtClean="0"/>
+              <a:rPr lang="en-US" altLang="zh-TW"/>
               <a:t>Third level</a:t>
             </a:r>
           </a:p>
           <a:p>
             <a:pPr lvl="3"/>
             <a:r>
-              <a:rPr lang="en-US" altLang="zh-TW" smtClean="0"/>
+              <a:rPr lang="en-US" altLang="zh-TW"/>
               <a:t>Fourth level</a:t>
             </a:r>
           </a:p>
           <a:p>
             <a:pPr lvl="4"/>
             <a:r>
-              <a:rPr lang="en-US" altLang="zh-TW" smtClean="0"/>
+              <a:rPr lang="en-US" altLang="zh-TW"/>
               <a:t>Fifth level</a:t>
             </a:r>
             <a:endParaRPr lang="zh-TW" altLang="en-US"/>
@@ -1807,7 +1807,7 @@
             <a:fld id="{86B5546F-C09B-4E63-ABC5-F7C86A7E8D66}" type="datetimeFigureOut">
               <a:rPr lang="en-US" smtClean="0"/>
               <a:pPr/>
-              <a:t>7/15/2020</a:t>
+              <a:t>8/1/2025</a:t>
             </a:fld>
             <a:endParaRPr lang="en-US"/>
           </a:p>
@@ -1902,7 +1902,7 @@
           <a:lstStyle/>
           <a:p>
             <a:r>
-              <a:rPr lang="en-US" altLang="zh-TW" smtClean="0"/>
+              <a:rPr lang="en-US" altLang="zh-TW"/>
               <a:t>Click to edit Master title style</a:t>
             </a:r>
             <a:endParaRPr lang="zh-TW" altLang="en-US"/>
@@ -1927,7 +1927,7 @@
             <a:fld id="{86B5546F-C09B-4E63-ABC5-F7C86A7E8D66}" type="datetimeFigureOut">
               <a:rPr lang="en-US" smtClean="0"/>
               <a:pPr/>
-              <a:t>7/15/2020</a:t>
+              <a:t>8/1/2025</a:t>
             </a:fld>
             <a:endParaRPr lang="en-US"/>
           </a:p>
@@ -2024,7 +2024,7 @@
             <a:fld id="{86B5546F-C09B-4E63-ABC5-F7C86A7E8D66}" type="datetimeFigureOut">
               <a:rPr lang="en-US" smtClean="0"/>
               <a:pPr/>
-              <a:t>7/15/2020</a:t>
+              <a:t>8/1/2025</a:t>
             </a:fld>
             <a:endParaRPr lang="en-US"/>
           </a:p>
@@ -2128,7 +2128,7 @@
           </a:lstStyle>
           <a:p>
             <a:r>
-              <a:rPr lang="en-US" altLang="zh-TW" smtClean="0"/>
+              <a:rPr lang="en-US" altLang="zh-TW"/>
               <a:t>Click to edit Master title style</a:t>
             </a:r>
             <a:endParaRPr lang="zh-TW" altLang="en-US"/>
@@ -2185,35 +2185,35 @@
           <a:p>
             <a:pPr lvl="0"/>
             <a:r>
-              <a:rPr lang="en-US" altLang="zh-TW" smtClean="0"/>
+              <a:rPr lang="en-US" altLang="zh-TW"/>
               <a:t>Edit Master text styles</a:t>
             </a:r>
           </a:p>
           <a:p>
             <a:pPr lvl="1"/>
             <a:r>
-              <a:rPr lang="en-US" altLang="zh-TW" smtClean="0"/>
+              <a:rPr lang="en-US" altLang="zh-TW"/>
               <a:t>Second level</a:t>
             </a:r>
           </a:p>
           <a:p>
             <a:pPr lvl="2"/>
             <a:r>
-              <a:rPr lang="en-US" altLang="zh-TW" smtClean="0"/>
+              <a:rPr lang="en-US" altLang="zh-TW"/>
               <a:t>Third level</a:t>
             </a:r>
           </a:p>
           <a:p>
             <a:pPr lvl="3"/>
             <a:r>
-              <a:rPr lang="en-US" altLang="zh-TW" smtClean="0"/>
+              <a:rPr lang="en-US" altLang="zh-TW"/>
               <a:t>Fourth level</a:t>
             </a:r>
           </a:p>
           <a:p>
             <a:pPr lvl="4"/>
             <a:r>
-              <a:rPr lang="en-US" altLang="zh-TW" smtClean="0"/>
+              <a:rPr lang="en-US" altLang="zh-TW"/>
               <a:t>Fifth level</a:t>
             </a:r>
             <a:endParaRPr lang="zh-TW" altLang="en-US"/>
@@ -2279,7 +2279,7 @@
           <a:p>
             <a:pPr lvl="0"/>
             <a:r>
-              <a:rPr lang="en-US" altLang="zh-TW" smtClean="0"/>
+              <a:rPr lang="en-US" altLang="zh-TW"/>
               <a:t>Edit Master text styles</a:t>
             </a:r>
           </a:p>
@@ -2303,7 +2303,7 @@
             <a:fld id="{86B5546F-C09B-4E63-ABC5-F7C86A7E8D66}" type="datetimeFigureOut">
               <a:rPr lang="en-US" smtClean="0"/>
               <a:pPr/>
-              <a:t>7/15/2020</a:t>
+              <a:t>8/1/2025</a:t>
             </a:fld>
             <a:endParaRPr lang="en-US"/>
           </a:p>
@@ -2407,7 +2407,7 @@
           </a:lstStyle>
           <a:p>
             <a:r>
-              <a:rPr lang="en-US" altLang="zh-TW" smtClean="0"/>
+              <a:rPr lang="en-US" altLang="zh-TW"/>
               <a:t>Click to edit Master title style</a:t>
             </a:r>
             <a:endParaRPr lang="zh-TW" altLang="en-US"/>
@@ -2472,7 +2472,7 @@
           </a:lstStyle>
           <a:p>
             <a:r>
-              <a:rPr lang="en-US" altLang="zh-TW" smtClean="0"/>
+              <a:rPr lang="en-US" altLang="zh-TW"/>
               <a:t>Click icon to add picture</a:t>
             </a:r>
             <a:endParaRPr lang="zh-TW" altLang="en-US"/>
@@ -2538,7 +2538,7 @@
           <a:p>
             <a:pPr lvl="0"/>
             <a:r>
-              <a:rPr lang="en-US" altLang="zh-TW" smtClean="0"/>
+              <a:rPr lang="en-US" altLang="zh-TW"/>
               <a:t>Edit Master text styles</a:t>
             </a:r>
           </a:p>
@@ -2562,7 +2562,7 @@
             <a:fld id="{86B5546F-C09B-4E63-ABC5-F7C86A7E8D66}" type="datetimeFigureOut">
               <a:rPr lang="en-US" smtClean="0"/>
               <a:pPr/>
-              <a:t>7/15/2020</a:t>
+              <a:t>8/1/2025</a:t>
             </a:fld>
             <a:endParaRPr lang="en-US"/>
           </a:p>
@@ -2677,10 +2677,9 @@
           <a:lstStyle/>
           <a:p>
             <a:r>
-              <a:rPr lang="zh-TW" altLang="en-US" smtClean="0"/>
+              <a:rPr lang="zh-TW" altLang="en-US"/>
               <a:t>按一下以編輯母片標題樣式</a:t>
             </a:r>
-            <a:endParaRPr lang="zh-TW" altLang="en-US"/>
           </a:p>
         </p:txBody>
       </p:sp>
@@ -2711,38 +2710,37 @@
           <a:p>
             <a:pPr lvl="0"/>
             <a:r>
-              <a:rPr lang="zh-TW" altLang="en-US" smtClean="0"/>
+              <a:rPr lang="zh-TW" altLang="en-US"/>
               <a:t>按一下以編輯母片文字樣式</a:t>
             </a:r>
           </a:p>
           <a:p>
             <a:pPr lvl="1"/>
             <a:r>
-              <a:rPr lang="zh-TW" altLang="en-US" smtClean="0"/>
+              <a:rPr lang="zh-TW" altLang="en-US"/>
               <a:t>第二層</a:t>
             </a:r>
           </a:p>
           <a:p>
             <a:pPr lvl="2"/>
             <a:r>
-              <a:rPr lang="zh-TW" altLang="en-US" smtClean="0"/>
+              <a:rPr lang="zh-TW" altLang="en-US"/>
               <a:t>第三層</a:t>
             </a:r>
           </a:p>
           <a:p>
             <a:pPr lvl="3"/>
             <a:r>
-              <a:rPr lang="zh-TW" altLang="en-US" smtClean="0"/>
+              <a:rPr lang="zh-TW" altLang="en-US"/>
               <a:t>第四層</a:t>
             </a:r>
           </a:p>
           <a:p>
             <a:pPr lvl="4"/>
             <a:r>
-              <a:rPr lang="zh-TW" altLang="en-US" smtClean="0"/>
+              <a:rPr lang="zh-TW" altLang="en-US"/>
               <a:t>第五層</a:t>
             </a:r>
-            <a:endParaRPr lang="zh-TW" altLang="en-US"/>
           </a:p>
         </p:txBody>
       </p:sp>
@@ -2782,7 +2780,7 @@
             <a:fld id="{86B5546F-C09B-4E63-ABC5-F7C86A7E8D66}" type="datetimeFigureOut">
               <a:rPr lang="en-US" smtClean="0"/>
               <a:pPr/>
-              <a:t>7/15/2020</a:t>
+              <a:t>8/1/2025</a:t>
             </a:fld>
             <a:endParaRPr lang="en-US"/>
           </a:p>
@@ -3190,24 +3188,7 @@
                 <a:latin typeface="微軟正黑體" pitchFamily="34" charset="-120"/>
                 <a:ea typeface="微軟正黑體" pitchFamily="34" charset="-120"/>
               </a:rPr>
-              <a:t>信</a:t>
-            </a:r>
-            <a:r>
-              <a:rPr lang="zh-CN" altLang="en-US" sz="9600" b="1" dirty="0" smtClean="0">
-                <a:solidFill>
-                  <a:srgbClr val="660033"/>
-                </a:solidFill>
-                <a:effectLst>
-                  <a:outerShdw blurRad="38100" dist="38100" dir="2700000" algn="tl">
-                    <a:srgbClr val="000000">
-                      <a:alpha val="43137"/>
-                    </a:srgbClr>
-                  </a:outerShdw>
-                </a:effectLst>
-                <a:latin typeface="微軟正黑體" pitchFamily="34" charset="-120"/>
-                <a:ea typeface="微軟正黑體" pitchFamily="34" charset="-120"/>
-              </a:rPr>
-              <a:t>徒生活</a:t>
+              <a:t>信徒生活</a:t>
             </a:r>
             <a:endParaRPr lang="en-US" sz="9600" b="1" dirty="0">
               <a:solidFill>
@@ -3249,24 +3230,14 @@
           <a:lstStyle/>
           <a:p>
             <a:r>
-              <a:rPr lang="zh-CN" altLang="en-US" b="1" dirty="0" smtClean="0">
+              <a:rPr lang="zh-CN" altLang="en-US" b="1" dirty="0">
                 <a:solidFill>
                   <a:srgbClr val="000066"/>
                 </a:solidFill>
                 <a:latin typeface="微軟正黑體" pitchFamily="34" charset="-120"/>
                 <a:ea typeface="微軟正黑體" pitchFamily="34" charset="-120"/>
               </a:rPr>
-              <a:t>以</a:t>
-            </a:r>
-            <a:r>
-              <a:rPr lang="zh-CN" altLang="en-US" b="1" dirty="0">
-                <a:solidFill>
-                  <a:srgbClr val="000066"/>
-                </a:solidFill>
-                <a:latin typeface="微軟正黑體" pitchFamily="34" charset="-120"/>
-                <a:ea typeface="微軟正黑體" pitchFamily="34" charset="-120"/>
-              </a:rPr>
-              <a:t>弗所書  </a:t>
+              <a:t>以弗所書  </a:t>
             </a:r>
             <a:r>
               <a:rPr lang="en-US" altLang="zh-CN" b="1" dirty="0">
@@ -3394,36 +3365,16 @@
           <a:lstStyle/>
           <a:p>
             <a:r>
-              <a:rPr lang="zh-TW" altLang="en-US" sz="6400" b="1" dirty="0" smtClean="0">
-                <a:solidFill>
-                  <a:srgbClr val="660033"/>
-                </a:solidFill>
-                <a:latin typeface="微軟正黑體" pitchFamily="34" charset="-120"/>
-                <a:ea typeface="微軟正黑體" pitchFamily="34" charset="-120"/>
-              </a:rPr>
-              <a:t>從</a:t>
-            </a:r>
-            <a:r>
-              <a:rPr lang="zh-TW" altLang="en-US" sz="6400" b="1" dirty="0">
-                <a:solidFill>
-                  <a:srgbClr val="660033"/>
-                </a:solidFill>
-                <a:latin typeface="微軟正黑體" pitchFamily="34" charset="-120"/>
-                <a:ea typeface="微軟正黑體" pitchFamily="34" charset="-120"/>
-              </a:rPr>
-              <a:t>前你們是暗昧的，但如今在主裡面是光明的，行事為人就當像光明的子女</a:t>
-            </a:r>
-            <a:r>
-              <a:rPr lang="zh-TW" altLang="en-US" sz="6400" b="1" dirty="0">
-                <a:solidFill>
-                  <a:srgbClr val="660033"/>
-                </a:solidFill>
-                <a:latin typeface="微軟正黑體" pitchFamily="34" charset="-120"/>
-                <a:ea typeface="微軟正黑體" pitchFamily="34" charset="-120"/>
-              </a:rPr>
-              <a:t>。</a:t>
-            </a:r>
-            <a:endParaRPr lang="en-US" altLang="zh-TW" sz="6400" b="1" dirty="0">
+              <a:rPr lang="zh-TW" altLang="en-US" sz="6400" dirty="0">
+                <a:solidFill>
+                  <a:srgbClr val="660033"/>
+                </a:solidFill>
+                <a:latin typeface="微軟正黑體" pitchFamily="34" charset="-120"/>
+                <a:ea typeface="微軟正黑體" pitchFamily="34" charset="-120"/>
+              </a:rPr>
+              <a:t>從前你們是暗昧的，但如今在主裡面是光明的，行事為人就當像光明的子女。</a:t>
+            </a:r>
+            <a:endParaRPr lang="en-US" altLang="zh-TW" sz="6400" dirty="0">
               <a:solidFill>
                 <a:srgbClr val="660033"/>
               </a:solidFill>
@@ -3433,27 +3384,17 @@
           </a:p>
           <a:p>
             <a:r>
-              <a:rPr lang="zh-TW" altLang="en-US" sz="6400" dirty="0" smtClean="0">
-                <a:solidFill>
-                  <a:srgbClr val="660033"/>
-                </a:solidFill>
-                <a:latin typeface="微軟正黑體" pitchFamily="34" charset="-120"/>
-                <a:ea typeface="微軟正黑體" pitchFamily="34" charset="-120"/>
-              </a:rPr>
-              <a:t>光</a:t>
-            </a:r>
-            <a:r>
-              <a:rPr lang="zh-TW" altLang="en-US" sz="6400" dirty="0">
-                <a:solidFill>
-                  <a:srgbClr val="660033"/>
-                </a:solidFill>
-                <a:latin typeface="微軟正黑體" pitchFamily="34" charset="-120"/>
-                <a:ea typeface="微軟正黑體" pitchFamily="34" charset="-120"/>
-              </a:rPr>
-              <a:t>明所結的果子就是一切良善、公義、，誠實。</a:t>
-            </a:r>
-            <a:r>
-              <a:rPr lang="en-US" altLang="zh-TW" sz="6400" dirty="0">
+              <a:rPr lang="zh-TW" altLang="en-US" sz="6400" b="1" dirty="0">
+                <a:solidFill>
+                  <a:srgbClr val="660033"/>
+                </a:solidFill>
+                <a:latin typeface="微軟正黑體" pitchFamily="34" charset="-120"/>
+                <a:ea typeface="微軟正黑體" pitchFamily="34" charset="-120"/>
+              </a:rPr>
+              <a:t>光明所結的果子就是一切良善、公義、誠實。</a:t>
+            </a:r>
+            <a:r>
+              <a:rPr lang="en-US" altLang="zh-TW" sz="6400" b="1" dirty="0">
                 <a:solidFill>
                   <a:srgbClr val="660033"/>
                 </a:solidFill>
@@ -3518,15 +3459,27 @@
           <a:lstStyle/>
           <a:p>
             <a:r>
-              <a:rPr lang="zh-TW" altLang="en-US" sz="6400" b="1" dirty="0" smtClean="0">
-                <a:solidFill>
-                  <a:srgbClr val="660033"/>
-                </a:solidFill>
-                <a:latin typeface="微軟正黑體" pitchFamily="34" charset="-120"/>
-                <a:ea typeface="微軟正黑體" pitchFamily="34" charset="-120"/>
-              </a:rPr>
-              <a:t>總</a:t>
-            </a:r>
+              <a:rPr lang="zh-TW" altLang="en-US" sz="6400" dirty="0">
+                <a:solidFill>
+                  <a:srgbClr val="660033"/>
+                </a:solidFill>
+                <a:latin typeface="微軟正黑體" pitchFamily="34" charset="-120"/>
+                <a:ea typeface="微軟正黑體" pitchFamily="34" charset="-120"/>
+              </a:rPr>
+              <a:t>總要察驗何為主所喜悅的事。</a:t>
+            </a:r>
+            <a:r>
+              <a:rPr lang="en-US" altLang="zh-TW" sz="6400" b="1" dirty="0">
+                <a:solidFill>
+                  <a:srgbClr val="660033"/>
+                </a:solidFill>
+                <a:latin typeface="微軟正黑體" pitchFamily="34" charset="-120"/>
+                <a:ea typeface="微軟正黑體" pitchFamily="34" charset="-120"/>
+              </a:rPr>
+              <a:t> </a:t>
+            </a:r>
+          </a:p>
+          <a:p>
             <a:r>
               <a:rPr lang="zh-TW" altLang="en-US" sz="6400" b="1" dirty="0">
                 <a:solidFill>
@@ -3535,7 +3488,7 @@
                 <a:latin typeface="微軟正黑體" pitchFamily="34" charset="-120"/>
                 <a:ea typeface="微軟正黑體" pitchFamily="34" charset="-120"/>
               </a:rPr>
-              <a:t>要察驗何為主所喜悅的事。</a:t>
+              <a:t>那暗昧無益的事，不要與人同行，倒要責備行這事的人；</a:t>
             </a:r>
             <a:r>
               <a:rPr lang="en-US" altLang="zh-TW" sz="6400" b="1" dirty="0">
@@ -3550,16 +3503,6 @@
           </a:p>
           <a:p>
             <a:r>
-              <a:rPr lang="zh-TW" altLang="en-US" sz="6400" dirty="0" smtClean="0">
-                <a:solidFill>
-                  <a:srgbClr val="660033"/>
-                </a:solidFill>
-                <a:latin typeface="微軟正黑體" pitchFamily="34" charset="-120"/>
-                <a:ea typeface="微軟正黑體" pitchFamily="34" charset="-120"/>
-              </a:rPr>
-              <a:t>那</a:t>
-            </a:r>
-            <a:r>
               <a:rPr lang="zh-TW" altLang="en-US" sz="6400" dirty="0">
                 <a:solidFill>
                   <a:srgbClr val="660033"/>
@@ -3567,7 +3510,7 @@
                 <a:latin typeface="微軟正黑體" pitchFamily="34" charset="-120"/>
                 <a:ea typeface="微軟正黑體" pitchFamily="34" charset="-120"/>
               </a:rPr>
-              <a:t>暗昧無益的事，不要與人同行，倒要責備行這事的人；</a:t>
+              <a:t>因為他們暗中所行的，就是提起來也是可恥的。</a:t>
             </a:r>
             <a:r>
               <a:rPr lang="en-US" altLang="zh-TW" sz="6400" dirty="0">
@@ -3579,35 +3522,6 @@
               </a:rPr>
               <a:t> </a:t>
             </a:r>
-          </a:p>
-          <a:p>
-            <a:r>
-              <a:rPr lang="zh-TW" altLang="en-US" sz="6400" b="1" dirty="0" smtClean="0">
-                <a:solidFill>
-                  <a:srgbClr val="660033"/>
-                </a:solidFill>
-                <a:latin typeface="微軟正黑體" pitchFamily="34" charset="-120"/>
-                <a:ea typeface="微軟正黑體" pitchFamily="34" charset="-120"/>
-              </a:rPr>
-              <a:t>因為他們暗中所行的，就是提起來也是可恥的。</a:t>
-            </a:r>
-            <a:r>
-              <a:rPr lang="en-US" altLang="zh-TW" sz="6400" b="1" dirty="0" smtClean="0">
-                <a:solidFill>
-                  <a:srgbClr val="660033"/>
-                </a:solidFill>
-                <a:latin typeface="微軟正黑體" pitchFamily="34" charset="-120"/>
-                <a:ea typeface="微軟正黑體" pitchFamily="34" charset="-120"/>
-              </a:rPr>
-              <a:t> </a:t>
-            </a:r>
-            <a:endParaRPr lang="en-US" altLang="zh-TW" sz="6400" b="1" dirty="0">
-              <a:solidFill>
-                <a:srgbClr val="660033"/>
-              </a:solidFill>
-              <a:latin typeface="微軟正黑體" pitchFamily="34" charset="-120"/>
-              <a:ea typeface="微軟正黑體" pitchFamily="34" charset="-120"/>
-            </a:endParaRPr>
           </a:p>
         </p:txBody>
       </p:sp>
@@ -3664,6 +3578,28 @@
           <a:lstStyle/>
           <a:p>
             <a:r>
+              <a:rPr lang="zh-TW" altLang="en-US" sz="6400" b="1" dirty="0">
+                <a:solidFill>
+                  <a:srgbClr val="660033"/>
+                </a:solidFill>
+                <a:latin typeface="微軟正黑體" pitchFamily="34" charset="-120"/>
+                <a:ea typeface="微軟正黑體" pitchFamily="34" charset="-120"/>
+              </a:rPr>
+              <a:t>凡事受了責備，就被光顯明出來，因為一切能顯明的就是光。</a:t>
+            </a:r>
+            <a:r>
+              <a:rPr lang="en-US" altLang="zh-TW" sz="6400" b="1" dirty="0">
+                <a:solidFill>
+                  <a:srgbClr val="660033"/>
+                </a:solidFill>
+                <a:latin typeface="微軟正黑體" pitchFamily="34" charset="-120"/>
+                <a:ea typeface="微軟正黑體" pitchFamily="34" charset="-120"/>
+              </a:rPr>
+              <a:t> </a:t>
+            </a:r>
+          </a:p>
+          <a:p>
+            <a:r>
               <a:rPr lang="zh-TW" altLang="en-US" sz="6400" dirty="0">
                 <a:solidFill>
                   <a:srgbClr val="660033"/>
@@ -3671,59 +3607,10 @@
                 <a:latin typeface="微軟正黑體" pitchFamily="34" charset="-120"/>
                 <a:ea typeface="微軟正黑體" pitchFamily="34" charset="-120"/>
               </a:rPr>
-              <a:t>凡</a:t>
-            </a:r>
-            <a:r>
-              <a:rPr lang="zh-TW" altLang="en-US" sz="6400" dirty="0">
-                <a:solidFill>
-                  <a:srgbClr val="660033"/>
-                </a:solidFill>
-                <a:latin typeface="微軟正黑體" pitchFamily="34" charset="-120"/>
-                <a:ea typeface="微軟正黑體" pitchFamily="34" charset="-120"/>
-              </a:rPr>
-              <a:t>事受了責備，就被光顯明出來，因為一切能顯明的就是光。</a:t>
+              <a:t>所以主說：你這睡著的人當醒過來，從死裡復活！基督就要光照你了。</a:t>
             </a:r>
             <a:r>
               <a:rPr lang="en-US" altLang="zh-TW" sz="6400" dirty="0">
-                <a:solidFill>
-                  <a:srgbClr val="660033"/>
-                </a:solidFill>
-                <a:latin typeface="微軟正黑體" pitchFamily="34" charset="-120"/>
-                <a:ea typeface="微軟正黑體" pitchFamily="34" charset="-120"/>
-              </a:rPr>
-              <a:t> </a:t>
-            </a:r>
-            <a:endParaRPr lang="en-US" altLang="zh-TW" sz="6400" dirty="0">
-              <a:solidFill>
-                <a:srgbClr val="660033"/>
-              </a:solidFill>
-              <a:latin typeface="微軟正黑體" pitchFamily="34" charset="-120"/>
-              <a:ea typeface="微軟正黑體" pitchFamily="34" charset="-120"/>
-            </a:endParaRPr>
-          </a:p>
-          <a:p>
-            <a:r>
-              <a:rPr lang="zh-TW" altLang="en-US" sz="6400" b="1" dirty="0">
-                <a:solidFill>
-                  <a:srgbClr val="660033"/>
-                </a:solidFill>
-                <a:latin typeface="微軟正黑體" pitchFamily="34" charset="-120"/>
-                <a:ea typeface="微軟正黑體" pitchFamily="34" charset="-120"/>
-              </a:rPr>
-              <a:t>所</a:t>
-            </a:r>
-            <a:r>
-              <a:rPr lang="zh-TW" altLang="en-US" sz="6400" b="1" dirty="0">
-                <a:solidFill>
-                  <a:srgbClr val="660033"/>
-                </a:solidFill>
-                <a:latin typeface="微軟正黑體" pitchFamily="34" charset="-120"/>
-                <a:ea typeface="微軟正黑體" pitchFamily="34" charset="-120"/>
-              </a:rPr>
-              <a:t>以主說：你這睡著的人當醒過來，從死裡復活！基督就要光照你了。</a:t>
-            </a:r>
-            <a:r>
-              <a:rPr lang="en-US" altLang="zh-TW" sz="6400" b="1" dirty="0">
                 <a:solidFill>
                   <a:srgbClr val="660033"/>
                 </a:solidFill>
@@ -3788,26 +3675,16 @@
           <a:lstStyle/>
           <a:p>
             <a:r>
-              <a:rPr lang="zh-TW" altLang="en-US" sz="6400" dirty="0">
-                <a:solidFill>
-                  <a:srgbClr val="660033"/>
-                </a:solidFill>
-                <a:latin typeface="微軟正黑體" pitchFamily="34" charset="-120"/>
-                <a:ea typeface="微軟正黑體" pitchFamily="34" charset="-120"/>
-              </a:rPr>
-              <a:t>你</a:t>
-            </a:r>
-            <a:r>
-              <a:rPr lang="zh-TW" altLang="en-US" sz="6400" dirty="0">
-                <a:solidFill>
-                  <a:srgbClr val="660033"/>
-                </a:solidFill>
-                <a:latin typeface="微軟正黑體" pitchFamily="34" charset="-120"/>
-                <a:ea typeface="微軟正黑體" pitchFamily="34" charset="-120"/>
-              </a:rPr>
-              <a:t>們要謹慎行事，不要像愚昧人，當像智慧人。</a:t>
-            </a:r>
-            <a:endParaRPr lang="en-US" altLang="zh-TW" sz="6400" dirty="0">
+              <a:rPr lang="zh-TW" altLang="en-US" sz="6400" b="1" dirty="0">
+                <a:solidFill>
+                  <a:srgbClr val="660033"/>
+                </a:solidFill>
+                <a:latin typeface="微軟正黑體" pitchFamily="34" charset="-120"/>
+                <a:ea typeface="微軟正黑體" pitchFamily="34" charset="-120"/>
+              </a:rPr>
+              <a:t>你們要謹慎行事，不要像愚昧人，當像智慧人。</a:t>
+            </a:r>
+            <a:endParaRPr lang="en-US" altLang="zh-TW" sz="6400" b="1" dirty="0">
               <a:solidFill>
                 <a:srgbClr val="660033"/>
               </a:solidFill>
@@ -3817,6 +3694,28 @@
           </a:p>
           <a:p>
             <a:r>
+              <a:rPr lang="zh-TW" altLang="en-US" sz="6400" dirty="0">
+                <a:solidFill>
+                  <a:srgbClr val="660033"/>
+                </a:solidFill>
+                <a:latin typeface="微軟正黑體" pitchFamily="34" charset="-120"/>
+                <a:ea typeface="微軟正黑體" pitchFamily="34" charset="-120"/>
+              </a:rPr>
+              <a:t>要愛惜光陰，因為現今的世代邪惡。</a:t>
+            </a:r>
+            <a:r>
+              <a:rPr lang="en-US" altLang="zh-TW" sz="6400" dirty="0">
+                <a:solidFill>
+                  <a:srgbClr val="660033"/>
+                </a:solidFill>
+                <a:latin typeface="微軟正黑體" pitchFamily="34" charset="-120"/>
+                <a:ea typeface="微軟正黑體" pitchFamily="34" charset="-120"/>
+              </a:rPr>
+              <a:t>  </a:t>
+            </a:r>
+          </a:p>
+          <a:p>
+            <a:r>
               <a:rPr lang="zh-TW" altLang="en-US" sz="6400" b="1" dirty="0">
                 <a:solidFill>
                   <a:srgbClr val="660033"/>
@@ -3824,59 +3723,10 @@
                 <a:latin typeface="微軟正黑體" pitchFamily="34" charset="-120"/>
                 <a:ea typeface="微軟正黑體" pitchFamily="34" charset="-120"/>
               </a:rPr>
-              <a:t>要</a:t>
-            </a:r>
-            <a:r>
-              <a:rPr lang="zh-TW" altLang="en-US" sz="6400" b="1" dirty="0">
-                <a:solidFill>
-                  <a:srgbClr val="660033"/>
-                </a:solidFill>
-                <a:latin typeface="微軟正黑體" pitchFamily="34" charset="-120"/>
-                <a:ea typeface="微軟正黑體" pitchFamily="34" charset="-120"/>
-              </a:rPr>
-              <a:t>愛惜光陰，因為現今的世代邪惡。</a:t>
+              <a:t>不要作糊塗人，要明白主的旨意如何。</a:t>
             </a:r>
             <a:r>
               <a:rPr lang="en-US" altLang="zh-TW" sz="6400" b="1" dirty="0">
-                <a:solidFill>
-                  <a:srgbClr val="660033"/>
-                </a:solidFill>
-                <a:latin typeface="微軟正黑體" pitchFamily="34" charset="-120"/>
-                <a:ea typeface="微軟正黑體" pitchFamily="34" charset="-120"/>
-              </a:rPr>
-              <a:t>  </a:t>
-            </a:r>
-            <a:endParaRPr lang="en-US" altLang="zh-TW" sz="6400" b="1" dirty="0" smtClean="0">
-              <a:solidFill>
-                <a:srgbClr val="660033"/>
-              </a:solidFill>
-              <a:latin typeface="微軟正黑體" pitchFamily="34" charset="-120"/>
-              <a:ea typeface="微軟正黑體" pitchFamily="34" charset="-120"/>
-            </a:endParaRPr>
-          </a:p>
-          <a:p>
-            <a:r>
-              <a:rPr lang="zh-TW" altLang="en-US" sz="6400" dirty="0" smtClean="0">
-                <a:solidFill>
-                  <a:srgbClr val="660033"/>
-                </a:solidFill>
-                <a:latin typeface="微軟正黑體" pitchFamily="34" charset="-120"/>
-                <a:ea typeface="微軟正黑體" pitchFamily="34" charset="-120"/>
-              </a:rPr>
-              <a:t>不</a:t>
-            </a:r>
-            <a:r>
-              <a:rPr lang="zh-TW" altLang="en-US" sz="6400" dirty="0">
-                <a:solidFill>
-                  <a:srgbClr val="660033"/>
-                </a:solidFill>
-                <a:latin typeface="微軟正黑體" pitchFamily="34" charset="-120"/>
-                <a:ea typeface="微軟正黑體" pitchFamily="34" charset="-120"/>
-              </a:rPr>
-              <a:t>要作糊塗人，要明白主的旨意如何。</a:t>
-            </a:r>
-            <a:r>
-              <a:rPr lang="en-US" altLang="zh-TW" sz="6400" dirty="0">
                 <a:solidFill>
                   <a:srgbClr val="660033"/>
                 </a:solidFill>
@@ -3941,6 +3791,28 @@
           <a:lstStyle/>
           <a:p>
             <a:r>
+              <a:rPr lang="zh-TW" altLang="en-US" sz="6400" dirty="0">
+                <a:solidFill>
+                  <a:srgbClr val="660033"/>
+                </a:solidFill>
+                <a:latin typeface="微軟正黑體" pitchFamily="34" charset="-120"/>
+                <a:ea typeface="微軟正黑體" pitchFamily="34" charset="-120"/>
+              </a:rPr>
+              <a:t>不要醉酒，酒能使人放蕩；乃要被聖靈充滿。</a:t>
+            </a:r>
+            <a:r>
+              <a:rPr lang="en-US" altLang="zh-TW" sz="6400" dirty="0">
+                <a:solidFill>
+                  <a:srgbClr val="660033"/>
+                </a:solidFill>
+                <a:latin typeface="微軟正黑體" pitchFamily="34" charset="-120"/>
+                <a:ea typeface="微軟正黑體" pitchFamily="34" charset="-120"/>
+              </a:rPr>
+              <a:t> </a:t>
+            </a:r>
+          </a:p>
+          <a:p>
+            <a:r>
               <a:rPr lang="zh-TW" altLang="en-US" sz="6400" b="1" dirty="0">
                 <a:solidFill>
                   <a:srgbClr val="660033"/>
@@ -3948,52 +3820,10 @@
                 <a:latin typeface="微軟正黑體" pitchFamily="34" charset="-120"/>
                 <a:ea typeface="微軟正黑體" pitchFamily="34" charset="-120"/>
               </a:rPr>
-              <a:t>不</a:t>
-            </a:r>
-            <a:r>
-              <a:rPr lang="zh-TW" altLang="en-US" sz="6400" b="1" dirty="0">
-                <a:solidFill>
-                  <a:srgbClr val="660033"/>
-                </a:solidFill>
-                <a:latin typeface="微軟正黑體" pitchFamily="34" charset="-120"/>
-                <a:ea typeface="微軟正黑體" pitchFamily="34" charset="-120"/>
-              </a:rPr>
-              <a:t>要醉酒，酒能使人放蕩；乃要被聖靈充滿。</a:t>
+              <a:t>當用詩章、頌詞、靈歌、彼此對說，口唱心和的讚美主。</a:t>
             </a:r>
             <a:r>
               <a:rPr lang="en-US" altLang="zh-TW" sz="6400" b="1" dirty="0">
-                <a:solidFill>
-                  <a:srgbClr val="660033"/>
-                </a:solidFill>
-                <a:latin typeface="微軟正黑體" pitchFamily="34" charset="-120"/>
-                <a:ea typeface="微軟正黑體" pitchFamily="34" charset="-120"/>
-              </a:rPr>
-              <a:t> </a:t>
-            </a:r>
-          </a:p>
-          <a:p>
-            <a:r>
-              <a:rPr lang="zh-TW" altLang="en-US" sz="6400" dirty="0">
-                <a:solidFill>
-                  <a:srgbClr val="660033"/>
-                </a:solidFill>
-                <a:latin typeface="微軟正黑體" pitchFamily="34" charset="-120"/>
-                <a:ea typeface="微軟正黑體" pitchFamily="34" charset="-120"/>
-              </a:rPr>
-              <a:t>當</a:t>
-            </a:r>
-            <a:r>
-              <a:rPr lang="zh-TW" altLang="en-US" sz="6400" dirty="0">
-                <a:solidFill>
-                  <a:srgbClr val="660033"/>
-                </a:solidFill>
-                <a:latin typeface="微軟正黑體" pitchFamily="34" charset="-120"/>
-                <a:ea typeface="微軟正黑體" pitchFamily="34" charset="-120"/>
-              </a:rPr>
-              <a:t>用詩章、頌詞、靈歌、彼此對說，口唱心和的讚美主。</a:t>
-            </a:r>
-            <a:r>
-              <a:rPr lang="en-US" altLang="zh-TW" sz="6400" dirty="0">
                 <a:solidFill>
                   <a:srgbClr val="660033"/>
                 </a:solidFill>
@@ -4058,6 +3888,28 @@
           <a:lstStyle/>
           <a:p>
             <a:r>
+              <a:rPr lang="zh-TW" altLang="en-US" sz="6400" dirty="0">
+                <a:solidFill>
+                  <a:srgbClr val="660033"/>
+                </a:solidFill>
+                <a:latin typeface="微軟正黑體" pitchFamily="34" charset="-120"/>
+                <a:ea typeface="微軟正黑體" pitchFamily="34" charset="-120"/>
+              </a:rPr>
+              <a:t>凡事要奉我們主耶穌基督的名常常感謝父神。</a:t>
+            </a:r>
+            <a:r>
+              <a:rPr lang="en-US" altLang="zh-TW" sz="6400" dirty="0">
+                <a:solidFill>
+                  <a:srgbClr val="660033"/>
+                </a:solidFill>
+                <a:latin typeface="微軟正黑體" pitchFamily="34" charset="-120"/>
+                <a:ea typeface="微軟正黑體" pitchFamily="34" charset="-120"/>
+              </a:rPr>
+              <a:t> </a:t>
+            </a:r>
+          </a:p>
+          <a:p>
+            <a:r>
               <a:rPr lang="zh-TW" altLang="en-US" sz="6400" b="1" dirty="0">
                 <a:solidFill>
                   <a:srgbClr val="660033"/>
@@ -4065,52 +3917,10 @@
                 <a:latin typeface="微軟正黑體" pitchFamily="34" charset="-120"/>
                 <a:ea typeface="微軟正黑體" pitchFamily="34" charset="-120"/>
               </a:rPr>
-              <a:t>凡</a:t>
-            </a:r>
-            <a:r>
-              <a:rPr lang="zh-TW" altLang="en-US" sz="6400" b="1" dirty="0">
-                <a:solidFill>
-                  <a:srgbClr val="660033"/>
-                </a:solidFill>
-                <a:latin typeface="微軟正黑體" pitchFamily="34" charset="-120"/>
-                <a:ea typeface="微軟正黑體" pitchFamily="34" charset="-120"/>
-              </a:rPr>
-              <a:t>事要奉我們主耶穌基督的名常常感謝父神。</a:t>
+              <a:t>又當存敬畏基督的心，彼此順服。</a:t>
             </a:r>
             <a:r>
               <a:rPr lang="en-US" altLang="zh-TW" sz="6400" b="1" dirty="0">
-                <a:solidFill>
-                  <a:srgbClr val="660033"/>
-                </a:solidFill>
-                <a:latin typeface="微軟正黑體" pitchFamily="34" charset="-120"/>
-                <a:ea typeface="微軟正黑體" pitchFamily="34" charset="-120"/>
-              </a:rPr>
-              <a:t> </a:t>
-            </a:r>
-          </a:p>
-          <a:p>
-            <a:r>
-              <a:rPr lang="zh-TW" altLang="en-US" sz="6400" dirty="0">
-                <a:solidFill>
-                  <a:srgbClr val="660033"/>
-                </a:solidFill>
-                <a:latin typeface="微軟正黑體" pitchFamily="34" charset="-120"/>
-                <a:ea typeface="微軟正黑體" pitchFamily="34" charset="-120"/>
-              </a:rPr>
-              <a:t>又</a:t>
-            </a:r>
-            <a:r>
-              <a:rPr lang="zh-TW" altLang="en-US" sz="6400" dirty="0">
-                <a:solidFill>
-                  <a:srgbClr val="660033"/>
-                </a:solidFill>
-                <a:latin typeface="微軟正黑體" pitchFamily="34" charset="-120"/>
-                <a:ea typeface="微軟正黑體" pitchFamily="34" charset="-120"/>
-              </a:rPr>
-              <a:t>當存敬畏基督的心，彼此順服。</a:t>
-            </a:r>
-            <a:r>
-              <a:rPr lang="en-US" altLang="zh-TW" sz="6400" dirty="0">
                 <a:solidFill>
                   <a:srgbClr val="660033"/>
                 </a:solidFill>
@@ -4175,16 +3985,6 @@
           <a:lstStyle/>
           <a:p>
             <a:r>
-              <a:rPr lang="zh-TW" altLang="en-US" sz="6400" dirty="0" smtClean="0">
-                <a:solidFill>
-                  <a:srgbClr val="660033"/>
-                </a:solidFill>
-                <a:latin typeface="微軟正黑體" pitchFamily="34" charset="-120"/>
-                <a:ea typeface="微軟正黑體" pitchFamily="34" charset="-120"/>
-              </a:rPr>
-              <a:t>所</a:t>
-            </a:r>
-            <a:r>
               <a:rPr lang="zh-TW" altLang="en-US" sz="6400" dirty="0">
                 <a:solidFill>
                   <a:srgbClr val="660033"/>
@@ -4192,7 +3992,7 @@
                 <a:latin typeface="微軟正黑體" pitchFamily="34" charset="-120"/>
                 <a:ea typeface="微軟正黑體" pitchFamily="34" charset="-120"/>
               </a:rPr>
-              <a:t>以你們要棄絕謊言，各人與鄰舍說實話，因為我們是互相為肢體。</a:t>
+              <a:t>所以你們要棄絕謊言，各人與鄰舍說實話，因為我們是互相為肢體。</a:t>
             </a:r>
             <a:r>
               <a:rPr lang="en-US" altLang="zh-TW" sz="6400" dirty="0">
@@ -4207,16 +4007,6 @@
           </a:p>
           <a:p>
             <a:r>
-              <a:rPr lang="zh-TW" altLang="en-US" sz="6400" b="1" dirty="0" smtClean="0">
-                <a:solidFill>
-                  <a:srgbClr val="660033"/>
-                </a:solidFill>
-                <a:latin typeface="微軟正黑體" pitchFamily="34" charset="-120"/>
-                <a:ea typeface="微軟正黑體" pitchFamily="34" charset="-120"/>
-              </a:rPr>
-              <a:t>生</a:t>
-            </a:r>
-            <a:r>
               <a:rPr lang="zh-TW" altLang="en-US" sz="6400" b="1" dirty="0">
                 <a:solidFill>
                   <a:srgbClr val="660033"/>
@@ -4224,17 +4014,7 @@
                 <a:latin typeface="微軟正黑體" pitchFamily="34" charset="-120"/>
                 <a:ea typeface="微軟正黑體" pitchFamily="34" charset="-120"/>
               </a:rPr>
-              <a:t>氣卻不要犯罪；不可含怒到日落，</a:t>
-            </a:r>
-            <a:r>
-              <a:rPr lang="en-US" altLang="zh-TW" sz="6400" b="1" dirty="0">
-                <a:solidFill>
-                  <a:srgbClr val="660033"/>
-                </a:solidFill>
-                <a:latin typeface="微軟正黑體" pitchFamily="34" charset="-120"/>
-                <a:ea typeface="微軟正黑體" pitchFamily="34" charset="-120"/>
-              </a:rPr>
-              <a:t> </a:t>
+              <a:t>生氣卻不要犯罪；不可含怒到日落，也不可給魔鬼留地步。</a:t>
             </a:r>
           </a:p>
         </p:txBody>
@@ -4292,16 +4072,6 @@
           <a:lstStyle/>
           <a:p>
             <a:r>
-              <a:rPr lang="zh-TW" altLang="en-US" sz="6400" dirty="0" smtClean="0">
-                <a:solidFill>
-                  <a:srgbClr val="660033"/>
-                </a:solidFill>
-                <a:latin typeface="微軟正黑體" pitchFamily="34" charset="-120"/>
-                <a:ea typeface="微軟正黑體" pitchFamily="34" charset="-120"/>
-              </a:rPr>
-              <a:t>也</a:t>
-            </a:r>
-            <a:r>
               <a:rPr lang="zh-TW" altLang="en-US" sz="6400" dirty="0">
                 <a:solidFill>
                   <a:srgbClr val="660033"/>
@@ -4309,49 +4079,10 @@
                 <a:latin typeface="微軟正黑體" pitchFamily="34" charset="-120"/>
                 <a:ea typeface="微軟正黑體" pitchFamily="34" charset="-120"/>
               </a:rPr>
-              <a:t>不可給魔鬼留地步</a:t>
-            </a:r>
-            <a:r>
-              <a:rPr lang="zh-TW" altLang="en-US" sz="6400" dirty="0">
-                <a:solidFill>
-                  <a:srgbClr val="660033"/>
-                </a:solidFill>
-                <a:latin typeface="微軟正黑體" pitchFamily="34" charset="-120"/>
-                <a:ea typeface="微軟正黑體" pitchFamily="34" charset="-120"/>
-              </a:rPr>
-              <a:t>。</a:t>
-            </a:r>
-            <a:endParaRPr lang="en-US" altLang="zh-TW" sz="6400" dirty="0">
-              <a:solidFill>
-                <a:srgbClr val="660033"/>
-              </a:solidFill>
-              <a:latin typeface="微軟正黑體" pitchFamily="34" charset="-120"/>
-              <a:ea typeface="微軟正黑體" pitchFamily="34" charset="-120"/>
-            </a:endParaRPr>
-          </a:p>
-          <a:p>
-            <a:r>
-              <a:rPr lang="zh-TW" altLang="en-US" sz="6400" b="1" dirty="0" smtClean="0">
-                <a:solidFill>
-                  <a:srgbClr val="660033"/>
-                </a:solidFill>
-                <a:latin typeface="微軟正黑體" pitchFamily="34" charset="-120"/>
-                <a:ea typeface="微軟正黑體" pitchFamily="34" charset="-120"/>
-              </a:rPr>
-              <a:t>從</a:t>
-            </a:r>
-            <a:r>
-              <a:rPr lang="zh-TW" altLang="en-US" sz="6400" b="1" dirty="0">
-                <a:solidFill>
-                  <a:srgbClr val="660033"/>
-                </a:solidFill>
-                <a:latin typeface="微軟正黑體" pitchFamily="34" charset="-120"/>
-                <a:ea typeface="微軟正黑體" pitchFamily="34" charset="-120"/>
-              </a:rPr>
-              <a:t>前偷竊的，不要再偷；總要勞力，親手做正經事，就可有餘分給那缺少的人。</a:t>
-            </a:r>
-            <a:r>
-              <a:rPr lang="en-US" altLang="zh-TW" sz="6400" b="1" dirty="0">
+              <a:t>從前偷竊的，不要再偷；總要勞力，親手做正經事，就可有餘分給那缺少的人。</a:t>
+            </a:r>
+            <a:r>
+              <a:rPr lang="en-US" altLang="zh-TW" sz="6400" dirty="0">
                 <a:solidFill>
                   <a:srgbClr val="660033"/>
                 </a:solidFill>
@@ -4416,6 +4147,16 @@
           <a:lstStyle/>
           <a:p>
             <a:r>
+              <a:rPr lang="zh-TW" altLang="en-US" sz="6400" b="1" dirty="0">
+                <a:solidFill>
+                  <a:srgbClr val="660033"/>
+                </a:solidFill>
+                <a:latin typeface="微軟正黑體" pitchFamily="34" charset="-120"/>
+                <a:ea typeface="微軟正黑體" pitchFamily="34" charset="-120"/>
+              </a:rPr>
+              <a:t>污穢的言語一句不可出口，只要隨事說造就人的好話，叫聽見的人得益處</a:t>
+            </a:r>
+            <a:r>
               <a:rPr lang="zh-TW" altLang="en-US" sz="6400" dirty="0">
                 <a:solidFill>
                   <a:srgbClr val="660033"/>
@@ -4423,8 +4164,20 @@
                 <a:latin typeface="微軟正黑體" pitchFamily="34" charset="-120"/>
                 <a:ea typeface="微軟正黑體" pitchFamily="34" charset="-120"/>
               </a:rPr>
-              <a:t>污</a:t>
-            </a:r>
+              <a:t>。</a:t>
+            </a:r>
+            <a:r>
+              <a:rPr lang="en-US" altLang="zh-TW" sz="6400" dirty="0">
+                <a:solidFill>
+                  <a:srgbClr val="660033"/>
+                </a:solidFill>
+                <a:latin typeface="微軟正黑體" pitchFamily="34" charset="-120"/>
+                <a:ea typeface="微軟正黑體" pitchFamily="34" charset="-120"/>
+              </a:rPr>
+              <a:t> </a:t>
+            </a:r>
+          </a:p>
+          <a:p>
             <a:r>
               <a:rPr lang="zh-TW" altLang="en-US" sz="6400" dirty="0">
                 <a:solidFill>
@@ -4433,49 +4186,10 @@
                 <a:latin typeface="微軟正黑體" pitchFamily="34" charset="-120"/>
                 <a:ea typeface="微軟正黑體" pitchFamily="34" charset="-120"/>
               </a:rPr>
-              <a:t>穢的言語一句不可出口，只要隨事說造就人的好話，叫聽見的人得益處。</a:t>
+              <a:t>不要叫神的聖靈擔憂；你們原是受了他的印記，等候得贖的日子來到。</a:t>
             </a:r>
             <a:r>
               <a:rPr lang="en-US" altLang="zh-TW" sz="6400" dirty="0">
-                <a:solidFill>
-                  <a:srgbClr val="660033"/>
-                </a:solidFill>
-                <a:latin typeface="微軟正黑體" pitchFamily="34" charset="-120"/>
-                <a:ea typeface="微軟正黑體" pitchFamily="34" charset="-120"/>
-              </a:rPr>
-              <a:t> </a:t>
-            </a:r>
-            <a:endParaRPr lang="en-US" altLang="zh-TW" sz="6400" dirty="0" smtClean="0">
-              <a:solidFill>
-                <a:srgbClr val="660033"/>
-              </a:solidFill>
-              <a:latin typeface="微軟正黑體" pitchFamily="34" charset="-120"/>
-              <a:ea typeface="微軟正黑體" pitchFamily="34" charset="-120"/>
-            </a:endParaRPr>
-          </a:p>
-          <a:p>
-            <a:r>
-              <a:rPr lang="zh-TW" altLang="en-US" sz="6400" b="1" dirty="0" smtClean="0">
-                <a:solidFill>
-                  <a:srgbClr val="660033"/>
-                </a:solidFill>
-                <a:latin typeface="微軟正黑體" pitchFamily="34" charset="-120"/>
-                <a:ea typeface="微軟正黑體" pitchFamily="34" charset="-120"/>
-              </a:rPr>
-              <a:t>不</a:t>
-            </a:r>
-            <a:r>
-              <a:rPr lang="zh-TW" altLang="en-US" sz="6400" b="1" dirty="0">
-                <a:solidFill>
-                  <a:srgbClr val="660033"/>
-                </a:solidFill>
-                <a:latin typeface="微軟正黑體" pitchFamily="34" charset="-120"/>
-                <a:ea typeface="微軟正黑體" pitchFamily="34" charset="-120"/>
-              </a:rPr>
-              <a:t>要叫神的聖靈擔憂；你們原是受了他的印記，等候得贖的日子來到。</a:t>
-            </a:r>
-            <a:r>
-              <a:rPr lang="en-US" altLang="zh-TW" sz="6400" b="1" dirty="0">
                 <a:solidFill>
                   <a:srgbClr val="660033"/>
                 </a:solidFill>
@@ -4540,36 +4254,16 @@
           <a:lstStyle/>
           <a:p>
             <a:r>
-              <a:rPr lang="zh-TW" altLang="en-US" sz="6400" dirty="0">
-                <a:solidFill>
-                  <a:srgbClr val="660033"/>
-                </a:solidFill>
-                <a:latin typeface="微軟正黑體" pitchFamily="34" charset="-120"/>
-                <a:ea typeface="微軟正黑體" pitchFamily="34" charset="-120"/>
-              </a:rPr>
-              <a:t>一</a:t>
-            </a:r>
-            <a:r>
-              <a:rPr lang="zh-TW" altLang="en-US" sz="6400" dirty="0">
-                <a:solidFill>
-                  <a:srgbClr val="660033"/>
-                </a:solidFill>
-                <a:latin typeface="微軟正黑體" pitchFamily="34" charset="-120"/>
-                <a:ea typeface="微軟正黑體" pitchFamily="34" charset="-120"/>
-              </a:rPr>
-              <a:t>切苦毒、惱恨、忿怒、嚷鬧、毀謗，並一切的惡毒，都當從你們中間除掉</a:t>
-            </a:r>
-            <a:r>
-              <a:rPr lang="zh-TW" altLang="en-US" sz="6400" dirty="0">
-                <a:solidFill>
-                  <a:srgbClr val="660033"/>
-                </a:solidFill>
-                <a:latin typeface="微軟正黑體" pitchFamily="34" charset="-120"/>
-                <a:ea typeface="微軟正黑體" pitchFamily="34" charset="-120"/>
-              </a:rPr>
-              <a:t>；</a:t>
-            </a:r>
-            <a:endParaRPr lang="en-US" altLang="zh-TW" sz="6400" dirty="0">
+              <a:rPr lang="zh-TW" altLang="en-US" sz="6400" b="1" dirty="0">
+                <a:solidFill>
+                  <a:srgbClr val="660033"/>
+                </a:solidFill>
+                <a:latin typeface="微軟正黑體" pitchFamily="34" charset="-120"/>
+                <a:ea typeface="微軟正黑體" pitchFamily="34" charset="-120"/>
+              </a:rPr>
+              <a:t>一切苦毒、惱恨、忿怒、嚷鬧、毀謗，並一切的惡毒，都當從你們中間除掉；</a:t>
+            </a:r>
+            <a:endParaRPr lang="en-US" altLang="zh-TW" sz="6400" b="1" dirty="0">
               <a:solidFill>
                 <a:srgbClr val="660033"/>
               </a:solidFill>
@@ -4579,27 +4273,17 @@
           </a:p>
           <a:p>
             <a:r>
-              <a:rPr lang="zh-TW" altLang="en-US" sz="6400" b="1" dirty="0">
-                <a:solidFill>
-                  <a:srgbClr val="660033"/>
-                </a:solidFill>
-                <a:latin typeface="微軟正黑體" pitchFamily="34" charset="-120"/>
-                <a:ea typeface="微軟正黑體" pitchFamily="34" charset="-120"/>
-              </a:rPr>
-              <a:t>並</a:t>
-            </a:r>
-            <a:r>
-              <a:rPr lang="zh-TW" altLang="en-US" sz="6400" b="1" dirty="0">
-                <a:solidFill>
-                  <a:srgbClr val="660033"/>
-                </a:solidFill>
-                <a:latin typeface="微軟正黑體" pitchFamily="34" charset="-120"/>
-                <a:ea typeface="微軟正黑體" pitchFamily="34" charset="-120"/>
-              </a:rPr>
-              <a:t>要以恩慈相待，存憐憫的心，彼此饒恕，正如神在基督裡饒恕了你們一樣。</a:t>
-            </a:r>
-            <a:r>
-              <a:rPr lang="en-US" altLang="zh-TW" sz="6400" b="1" dirty="0">
+              <a:rPr lang="zh-TW" altLang="en-US" sz="6400" dirty="0">
+                <a:solidFill>
+                  <a:srgbClr val="660033"/>
+                </a:solidFill>
+                <a:latin typeface="微軟正黑體" pitchFamily="34" charset="-120"/>
+                <a:ea typeface="微軟正黑體" pitchFamily="34" charset="-120"/>
+              </a:rPr>
+              <a:t>並要以恩慈相待，存憐憫的心，彼此饒恕，正如神在基督裡饒恕了你們一樣。</a:t>
+            </a:r>
+            <a:r>
+              <a:rPr lang="en-US" altLang="zh-TW" sz="6400" dirty="0">
                 <a:solidFill>
                   <a:srgbClr val="660033"/>
                 </a:solidFill>
@@ -4664,45 +4348,6 @@
           <a:lstStyle/>
           <a:p>
             <a:r>
-              <a:rPr lang="zh-TW" altLang="en-US" sz="6400" dirty="0">
-                <a:solidFill>
-                  <a:srgbClr val="660033"/>
-                </a:solidFill>
-                <a:latin typeface="微軟正黑體" pitchFamily="34" charset="-120"/>
-                <a:ea typeface="微軟正黑體" pitchFamily="34" charset="-120"/>
-              </a:rPr>
-              <a:t>所</a:t>
-            </a:r>
-            <a:r>
-              <a:rPr lang="zh-TW" altLang="en-US" sz="6400" dirty="0">
-                <a:solidFill>
-                  <a:srgbClr val="660033"/>
-                </a:solidFill>
-                <a:latin typeface="微軟正黑體" pitchFamily="34" charset="-120"/>
-                <a:ea typeface="微軟正黑體" pitchFamily="34" charset="-120"/>
-              </a:rPr>
-              <a:t>以，你們該效法神，好像蒙慈愛的兒女一樣</a:t>
-            </a:r>
-            <a:r>
-              <a:rPr lang="zh-TW" altLang="en-US" sz="6400" dirty="0">
-                <a:solidFill>
-                  <a:srgbClr val="660033"/>
-                </a:solidFill>
-                <a:latin typeface="微軟正黑體" pitchFamily="34" charset="-120"/>
-                <a:ea typeface="微軟正黑體" pitchFamily="34" charset="-120"/>
-              </a:rPr>
-              <a:t>。</a:t>
-            </a:r>
-            <a:endParaRPr lang="en-US" altLang="zh-TW" sz="6400" dirty="0">
-              <a:solidFill>
-                <a:srgbClr val="660033"/>
-              </a:solidFill>
-              <a:latin typeface="微軟正黑體" pitchFamily="34" charset="-120"/>
-              <a:ea typeface="微軟正黑體" pitchFamily="34" charset="-120"/>
-            </a:endParaRPr>
-          </a:p>
-          <a:p>
-            <a:r>
               <a:rPr lang="zh-TW" altLang="en-US" sz="6400" b="1" dirty="0">
                 <a:solidFill>
                   <a:srgbClr val="660033"/>
@@ -4710,37 +4355,7 @@
                 <a:latin typeface="微軟正黑體" pitchFamily="34" charset="-120"/>
                 <a:ea typeface="微軟正黑體" pitchFamily="34" charset="-120"/>
               </a:rPr>
-              <a:t>也</a:t>
-            </a:r>
-            <a:r>
-              <a:rPr lang="zh-TW" altLang="en-US" sz="6400" b="1" dirty="0">
-                <a:solidFill>
-                  <a:srgbClr val="660033"/>
-                </a:solidFill>
-                <a:latin typeface="微軟正黑體" pitchFamily="34" charset="-120"/>
-                <a:ea typeface="微軟正黑體" pitchFamily="34" charset="-120"/>
-              </a:rPr>
-              <a:t>要憑愛心行事，正如基督愛我們，為我們捨了自己，當作馨香的供物和祭物，獻與神。</a:t>
-            </a:r>
-            <a:r>
-              <a:rPr lang="en-US" altLang="zh-TW" sz="6400" b="1" dirty="0">
-                <a:solidFill>
-                  <a:srgbClr val="660033"/>
-                </a:solidFill>
-                <a:latin typeface="微軟正黑體" pitchFamily="34" charset="-120"/>
-                <a:ea typeface="微軟正黑體" pitchFamily="34" charset="-120"/>
-              </a:rPr>
-              <a:t> </a:t>
-            </a:r>
-            <a:r>
-              <a:rPr lang="en-US" altLang="zh-TW" sz="6400" b="1" dirty="0">
-                <a:solidFill>
-                  <a:srgbClr val="660033"/>
-                </a:solidFill>
-                <a:latin typeface="微軟正黑體" pitchFamily="34" charset="-120"/>
-                <a:ea typeface="微軟正黑體" pitchFamily="34" charset="-120"/>
-              </a:rPr>
-              <a:t> </a:t>
+              <a:t>所以，你們該效法神，好像蒙慈愛的兒女一樣。</a:t>
             </a:r>
             <a:endParaRPr lang="en-US" altLang="zh-TW" sz="6400" b="1" dirty="0">
               <a:solidFill>
@@ -4749,6 +4364,28 @@
               <a:latin typeface="微軟正黑體" pitchFamily="34" charset="-120"/>
               <a:ea typeface="微軟正黑體" pitchFamily="34" charset="-120"/>
             </a:endParaRPr>
+          </a:p>
+          <a:p>
+            <a:r>
+              <a:rPr lang="zh-TW" altLang="en-US" sz="6400" dirty="0">
+                <a:solidFill>
+                  <a:srgbClr val="660033"/>
+                </a:solidFill>
+                <a:latin typeface="微軟正黑體" pitchFamily="34" charset="-120"/>
+                <a:ea typeface="微軟正黑體" pitchFamily="34" charset="-120"/>
+              </a:rPr>
+              <a:t>也要憑愛心行事，正如基督愛我們，為我們捨了自己，當作馨香的供物和祭物，獻與神。</a:t>
+            </a:r>
+            <a:r>
+              <a:rPr lang="en-US" altLang="zh-TW" sz="6400" dirty="0">
+                <a:solidFill>
+                  <a:srgbClr val="660033"/>
+                </a:solidFill>
+                <a:latin typeface="微軟正黑體" pitchFamily="34" charset="-120"/>
+                <a:ea typeface="微軟正黑體" pitchFamily="34" charset="-120"/>
+              </a:rPr>
+              <a:t>  </a:t>
+            </a:r>
           </a:p>
         </p:txBody>
       </p:sp>
@@ -4805,6 +4442,28 @@
           <a:lstStyle/>
           <a:p>
             <a:r>
+              <a:rPr lang="zh-TW" altLang="en-US" sz="6400" b="1" dirty="0">
+                <a:solidFill>
+                  <a:srgbClr val="660033"/>
+                </a:solidFill>
+                <a:latin typeface="微軟正黑體" pitchFamily="34" charset="-120"/>
+                <a:ea typeface="微軟正黑體" pitchFamily="34" charset="-120"/>
+              </a:rPr>
+              <a:t>至於淫亂並一切污穢，或是貪婪，在你們中間連提都不可，方合聖徒的體統。</a:t>
+            </a:r>
+            <a:r>
+              <a:rPr lang="en-US" altLang="zh-TW" sz="6400" b="1" dirty="0">
+                <a:solidFill>
+                  <a:srgbClr val="660033"/>
+                </a:solidFill>
+                <a:latin typeface="微軟正黑體" pitchFamily="34" charset="-120"/>
+                <a:ea typeface="微軟正黑體" pitchFamily="34" charset="-120"/>
+              </a:rPr>
+              <a:t> </a:t>
+            </a:r>
+          </a:p>
+          <a:p>
+            <a:r>
               <a:rPr lang="zh-TW" altLang="en-US" sz="6400" dirty="0">
                 <a:solidFill>
                   <a:srgbClr val="660033"/>
@@ -4812,59 +4471,10 @@
                 <a:latin typeface="微軟正黑體" pitchFamily="34" charset="-120"/>
                 <a:ea typeface="微軟正黑體" pitchFamily="34" charset="-120"/>
               </a:rPr>
-              <a:t>至</a:t>
-            </a:r>
-            <a:r>
-              <a:rPr lang="zh-TW" altLang="en-US" sz="6400" dirty="0">
-                <a:solidFill>
-                  <a:srgbClr val="660033"/>
-                </a:solidFill>
-                <a:latin typeface="微軟正黑體" pitchFamily="34" charset="-120"/>
-                <a:ea typeface="微軟正黑體" pitchFamily="34" charset="-120"/>
-              </a:rPr>
-              <a:t>於淫亂並一切污穢，或是貪婪，在你們中間連提都不可，方合聖徒的體統。</a:t>
+              <a:t>淫詞、妄語，和戲笑的話都不相宜；總要說感謝的話。</a:t>
             </a:r>
             <a:r>
               <a:rPr lang="en-US" altLang="zh-TW" sz="6400" dirty="0">
-                <a:solidFill>
-                  <a:srgbClr val="660033"/>
-                </a:solidFill>
-                <a:latin typeface="微軟正黑體" pitchFamily="34" charset="-120"/>
-                <a:ea typeface="微軟正黑體" pitchFamily="34" charset="-120"/>
-              </a:rPr>
-              <a:t> </a:t>
-            </a:r>
-            <a:endParaRPr lang="en-US" altLang="zh-TW" sz="6400" dirty="0">
-              <a:solidFill>
-                <a:srgbClr val="660033"/>
-              </a:solidFill>
-              <a:latin typeface="微軟正黑體" pitchFamily="34" charset="-120"/>
-              <a:ea typeface="微軟正黑體" pitchFamily="34" charset="-120"/>
-            </a:endParaRPr>
-          </a:p>
-          <a:p>
-            <a:r>
-              <a:rPr lang="zh-TW" altLang="en-US" sz="6400" b="1" dirty="0" smtClean="0">
-                <a:solidFill>
-                  <a:srgbClr val="660033"/>
-                </a:solidFill>
-                <a:latin typeface="微軟正黑體" pitchFamily="34" charset="-120"/>
-                <a:ea typeface="微軟正黑體" pitchFamily="34" charset="-120"/>
-              </a:rPr>
-              <a:t>淫</a:t>
-            </a:r>
-            <a:r>
-              <a:rPr lang="zh-TW" altLang="en-US" sz="6400" b="1" dirty="0">
-                <a:solidFill>
-                  <a:srgbClr val="660033"/>
-                </a:solidFill>
-                <a:latin typeface="微軟正黑體" pitchFamily="34" charset="-120"/>
-                <a:ea typeface="微軟正黑體" pitchFamily="34" charset="-120"/>
-              </a:rPr>
-              <a:t>詞、妄語，和戲笑的話都不相宜；總要說感謝的話。</a:t>
-            </a:r>
-            <a:r>
-              <a:rPr lang="en-US" altLang="zh-TW" sz="6400" b="1" dirty="0">
                 <a:solidFill>
                   <a:srgbClr val="660033"/>
                 </a:solidFill>
@@ -4929,27 +4539,17 @@
           <a:lstStyle/>
           <a:p>
             <a:r>
-              <a:rPr lang="zh-TW" altLang="en-US" sz="6400" dirty="0">
-                <a:solidFill>
-                  <a:srgbClr val="660033"/>
-                </a:solidFill>
-                <a:latin typeface="微軟正黑體" pitchFamily="34" charset="-120"/>
-                <a:ea typeface="微軟正黑體" pitchFamily="34" charset="-120"/>
-              </a:rPr>
-              <a:t>因</a:t>
-            </a:r>
-            <a:r>
-              <a:rPr lang="zh-TW" altLang="en-US" sz="6400" dirty="0">
-                <a:solidFill>
-                  <a:srgbClr val="660033"/>
-                </a:solidFill>
-                <a:latin typeface="微軟正黑體" pitchFamily="34" charset="-120"/>
-                <a:ea typeface="微軟正黑體" pitchFamily="34" charset="-120"/>
-              </a:rPr>
-              <a:t>為你們確實的知道，無論是淫亂的，是污穢的，是有貪心的，在基督和神的國裡都是無分的。有貪心的，就與拜偶像的一樣。</a:t>
-            </a:r>
-            <a:r>
-              <a:rPr lang="en-US" altLang="zh-TW" sz="6400" dirty="0">
+              <a:rPr lang="zh-TW" altLang="en-US" sz="6400" b="1" dirty="0">
+                <a:solidFill>
+                  <a:srgbClr val="660033"/>
+                </a:solidFill>
+                <a:latin typeface="微軟正黑體" pitchFamily="34" charset="-120"/>
+                <a:ea typeface="微軟正黑體" pitchFamily="34" charset="-120"/>
+              </a:rPr>
+              <a:t>因為你們確實的知道，無論是淫亂的，是污穢的，是有貪心的，在基督和神的國裡都是無分的。有貪心的，就與拜偶像的一樣。</a:t>
+            </a:r>
+            <a:r>
+              <a:rPr lang="en-US" altLang="zh-TW" sz="6400" b="1" dirty="0">
                 <a:solidFill>
                   <a:srgbClr val="660033"/>
                 </a:solidFill>
@@ -5014,6 +4614,28 @@
           <a:lstStyle/>
           <a:p>
             <a:r>
+              <a:rPr lang="zh-TW" altLang="en-US" sz="6400" dirty="0">
+                <a:solidFill>
+                  <a:srgbClr val="660033"/>
+                </a:solidFill>
+                <a:latin typeface="微軟正黑體" pitchFamily="34" charset="-120"/>
+                <a:ea typeface="微軟正黑體" pitchFamily="34" charset="-120"/>
+              </a:rPr>
+              <a:t>不要被人虛浮的話欺哄；因這些事，神的忿怒必臨到那悖逆之子。</a:t>
+            </a:r>
+            <a:r>
+              <a:rPr lang="en-US" altLang="zh-TW" sz="6400" dirty="0">
+                <a:solidFill>
+                  <a:srgbClr val="660033"/>
+                </a:solidFill>
+                <a:latin typeface="微軟正黑體" pitchFamily="34" charset="-120"/>
+                <a:ea typeface="微軟正黑體" pitchFamily="34" charset="-120"/>
+              </a:rPr>
+              <a:t> </a:t>
+            </a:r>
+          </a:p>
+          <a:p>
+            <a:r>
               <a:rPr lang="zh-TW" altLang="en-US" sz="6400" b="1" dirty="0">
                 <a:solidFill>
                   <a:srgbClr val="660033"/>
@@ -5021,52 +4643,10 @@
                 <a:latin typeface="微軟正黑體" pitchFamily="34" charset="-120"/>
                 <a:ea typeface="微軟正黑體" pitchFamily="34" charset="-120"/>
               </a:rPr>
-              <a:t>不</a:t>
-            </a:r>
-            <a:r>
-              <a:rPr lang="zh-TW" altLang="en-US" sz="6400" b="1" dirty="0">
-                <a:solidFill>
-                  <a:srgbClr val="660033"/>
-                </a:solidFill>
-                <a:latin typeface="微軟正黑體" pitchFamily="34" charset="-120"/>
-                <a:ea typeface="微軟正黑體" pitchFamily="34" charset="-120"/>
-              </a:rPr>
-              <a:t>要被人虛浮的話欺哄；因這些事，神的忿怒必臨到那悖逆之子。</a:t>
+              <a:t>所以，你們不要與他們同夥。</a:t>
             </a:r>
             <a:r>
               <a:rPr lang="en-US" altLang="zh-TW" sz="6400" b="1" dirty="0">
-                <a:solidFill>
-                  <a:srgbClr val="660033"/>
-                </a:solidFill>
-                <a:latin typeface="微軟正黑體" pitchFamily="34" charset="-120"/>
-                <a:ea typeface="微軟正黑體" pitchFamily="34" charset="-120"/>
-              </a:rPr>
-              <a:t> </a:t>
-            </a:r>
-          </a:p>
-          <a:p>
-            <a:r>
-              <a:rPr lang="zh-TW" altLang="en-US" sz="6400" dirty="0">
-                <a:solidFill>
-                  <a:srgbClr val="660033"/>
-                </a:solidFill>
-                <a:latin typeface="微軟正黑體" pitchFamily="34" charset="-120"/>
-                <a:ea typeface="微軟正黑體" pitchFamily="34" charset="-120"/>
-              </a:rPr>
-              <a:t>所</a:t>
-            </a:r>
-            <a:r>
-              <a:rPr lang="zh-TW" altLang="en-US" sz="6400" dirty="0">
-                <a:solidFill>
-                  <a:srgbClr val="660033"/>
-                </a:solidFill>
-                <a:latin typeface="微軟正黑體" pitchFamily="34" charset="-120"/>
-                <a:ea typeface="微軟正黑體" pitchFamily="34" charset="-120"/>
-              </a:rPr>
-              <a:t>以，你們不要與他們同夥。</a:t>
-            </a:r>
-            <a:r>
-              <a:rPr lang="en-US" altLang="zh-TW" sz="6400" dirty="0">
                 <a:solidFill>
                   <a:srgbClr val="660033"/>
                 </a:solidFill>
